--- a/system-design-101/vi/lessons/sd-11-003/slides/sd-11-003.pptx
+++ b/system-design-101/vi/lessons/sd-11-003/slides/sd-11-003.pptx
@@ -11964,7 +11964,7 @@
         <p:spPr>
           <a:xfrm>
             <a:off x="914400" y="7905750"/>
-            <a:ext cx="16459200" cy="571500"/>
+            <a:ext cx="16459200" cy="1047750"/>
           </a:xfrm>
           <a:prstGeom prst="rect">
             <a:avLst/>
@@ -11980,6 +11980,111 @@
               <a:buNone/>
             </a:pPr>
             <a:r>
+              <a:rPr lang="en-US" sz="2400" dirty="0" spc="2" kern="0">
+                <a:solidFill>
+                  <a:srgbClr val="9AA0B5"/>
+                </a:solidFill>
+                <a:latin typeface="Be Vietnam Pro" pitchFamily="34" charset="0"/>
+                <a:ea typeface="Be Vietnam Pro" pitchFamily="34" charset="-122"/>
+                <a:cs typeface="Be Vietnam Pro" pitchFamily="34" charset="-120"/>
+              </a:rPr>
+              <a:t>Không</a:t>
+            </a:r>
+            <a:r>
+              <a:rPr lang="en-US" sz="2400" dirty="0" spc="-8" kern="0">
+                <a:solidFill>
+                  <a:srgbClr val="9AA0B5"/>
+                </a:solidFill>
+                <a:latin typeface="Be Vietnam Pro" pitchFamily="34" charset="0"/>
+                <a:ea typeface="Be Vietnam Pro" pitchFamily="34" charset="-122"/>
+                <a:cs typeface="Be Vietnam Pro" pitchFamily="34" charset="-120"/>
+              </a:rPr>
+              <a:t> mất</a:t>
+            </a:r>
+            <a:r>
+              <a:rPr lang="en-US" sz="2400" dirty="0" spc="1" kern="0">
+                <a:solidFill>
+                  <a:srgbClr val="9AA0B5"/>
+                </a:solidFill>
+                <a:latin typeface="Be Vietnam Pro" pitchFamily="34" charset="0"/>
+                <a:ea typeface="Be Vietnam Pro" pitchFamily="34" charset="-122"/>
+                <a:cs typeface="Be Vietnam Pro" pitchFamily="34" charset="-120"/>
+              </a:rPr>
+              <a:t> ghi:</a:t>
+            </a:r>
+            <a:r>
+              <a:rPr lang="en-US" sz="2400" dirty="0" spc="-1" kern="0">
+                <a:solidFill>
+                  <a:srgbClr val="9AA0B5"/>
+                </a:solidFill>
+                <a:latin typeface="Be Vietnam Pro" pitchFamily="34" charset="0"/>
+                <a:ea typeface="Be Vietnam Pro" pitchFamily="34" charset="-122"/>
+                <a:cs typeface="Be Vietnam Pro" pitchFamily="34" charset="-120"/>
+              </a:rPr>
+              <a:t> leader</a:t>
+            </a:r>
+            <a:r>
+              <a:rPr lang="en-US" sz="2400" dirty="0" spc="1" kern="0">
+                <a:solidFill>
+                  <a:srgbClr val="9AA0B5"/>
+                </a:solidFill>
+                <a:latin typeface="Be Vietnam Pro" pitchFamily="34" charset="0"/>
+                <a:ea typeface="Be Vietnam Pro" pitchFamily="34" charset="-122"/>
+                <a:cs typeface="Be Vietnam Pro" pitchFamily="34" charset="-120"/>
+              </a:rPr>
+              <a:t> chờ</a:t>
+            </a:r>
+            <a:r>
+              <a:rPr lang="en-US" sz="2400" dirty="0" spc="-1" kern="0">
+                <a:solidFill>
+                  <a:srgbClr val="9AA0B5"/>
+                </a:solidFill>
+                <a:latin typeface="Be Vietnam Pro" pitchFamily="34" charset="0"/>
+                <a:ea typeface="Be Vietnam Pro" pitchFamily="34" charset="-122"/>
+                <a:cs typeface="Be Vietnam Pro" pitchFamily="34" charset="-120"/>
+              </a:rPr>
+              <a:t> bản</a:t>
+            </a:r>
+            <a:r>
+              <a:rPr lang="en-US" sz="2400" dirty="0" spc="-5" kern="0">
+                <a:solidFill>
+                  <a:srgbClr val="9AA0B5"/>
+                </a:solidFill>
+                <a:latin typeface="Be Vietnam Pro" pitchFamily="34" charset="0"/>
+                <a:ea typeface="Be Vietnam Pro" pitchFamily="34" charset="-122"/>
+                <a:cs typeface="Be Vietnam Pro" pitchFamily="34" charset="-120"/>
+              </a:rPr>
+              <a:t> sao</a:t>
+            </a:r>
+            <a:r>
+              <a:rPr lang="en-US" sz="2400" dirty="0" spc="-17" kern="0">
+                <a:solidFill>
+                  <a:srgbClr val="9AA0B5"/>
+                </a:solidFill>
+                <a:latin typeface="Be Vietnam Pro" pitchFamily="34" charset="0"/>
+                <a:ea typeface="Be Vietnam Pro" pitchFamily="34" charset="-122"/>
+                <a:cs typeface="Be Vietnam Pro" pitchFamily="34" charset="-120"/>
+              </a:rPr>
+              <a:t> xác</a:t>
+            </a:r>
+            <a:r>
+              <a:rPr lang="en-US" sz="2400" dirty="0" spc="1" kern="0">
+                <a:solidFill>
+                  <a:srgbClr val="9AA0B5"/>
+                </a:solidFill>
+                <a:latin typeface="Be Vietnam Pro" pitchFamily="34" charset="0"/>
+                <a:ea typeface="Be Vietnam Pro" pitchFamily="34" charset="-122"/>
+                <a:cs typeface="Be Vietnam Pro" pitchFamily="34" charset="-120"/>
+              </a:rPr>
+              <a:t> nhận.</a:t>
+            </a:r>
+            <a:endParaRPr lang="en-US" sz="2400" dirty="0"/>
+          </a:p>
+          <a:p>
+            <a:pPr algn="l" indent="0" marL="0">
+              <a:buNone/>
+            </a:pPr>
+            <a:r>
               <a:rPr lang="en-US" sz="2400" dirty="0" spc="8" kern="0">
                 <a:solidFill>
                   <a:srgbClr val="9AA0B5"/>
@@ -12054,51 +12159,7 @@
                 <a:ea typeface="Be Vietnam Pro" pitchFamily="34" charset="-122"/>
                 <a:cs typeface="Be Vietnam Pro" pitchFamily="34" charset="-120"/>
               </a:rPr>
-              <a:t> ghi</a:t>
-            </a:r>
-            <a:r>
-              <a:rPr lang="en-US" sz="2400" dirty="0" spc="3" kern="0">
-                <a:solidFill>
-                  <a:srgbClr val="9AA0B5"/>
-                </a:solidFill>
-                <a:latin typeface="Be Vietnam Pro" pitchFamily="34" charset="0"/>
-                <a:ea typeface="Be Vietnam Pro" pitchFamily="34" charset="-122"/>
-                <a:cs typeface="Be Vietnam Pro" pitchFamily="34" charset="-120"/>
-              </a:rPr>
-              <a:t> là</a:t>
-            </a:r>
-            <a:r>
-              <a:rPr lang="en-US" sz="2400" dirty="0" spc="-2" kern="0">
-                <a:solidFill>
-                  <a:srgbClr val="9AA0B5"/>
-                </a:solidFill>
-                <a:latin typeface="Be Vietnam Pro" pitchFamily="34" charset="0"/>
-                <a:ea typeface="Be Vietnam Pro" pitchFamily="34" charset="-122"/>
-                <a:cs typeface="Be Vietnam Pro" pitchFamily="34" charset="-120"/>
-              </a:rPr>
-              <a:t> bài</a:t>
-            </a:r>
-            <a:r>
-              <a:rPr lang="en-US" sz="2400" dirty="0" spc="-9" kern="0">
-                <a:solidFill>
-                  <a:srgbClr val="9AA0B5"/>
-                </a:solidFill>
-                <a:latin typeface="Be Vietnam Pro" pitchFamily="34" charset="0"/>
-                <a:ea typeface="Be Vietnam Pro" pitchFamily="34" charset="-122"/>
-                <a:cs typeface="Be Vietnam Pro" pitchFamily="34" charset="-120"/>
-              </a:rPr>
-              <a:t> toán</a:t>
-            </a:r>
-            <a:r>
-              <a:rPr lang="en-US" sz="2400" dirty="0" spc="-1" kern="0">
-                <a:solidFill>
-                  <a:srgbClr val="9AA0B5"/>
-                </a:solidFill>
-                <a:latin typeface="Be Vietnam Pro" pitchFamily="34" charset="0"/>
-                <a:ea typeface="Be Vietnam Pro" pitchFamily="34" charset="-122"/>
-                <a:cs typeface="Be Vietnam Pro" pitchFamily="34" charset="-120"/>
-              </a:rPr>
-              <a:t> khó</a:t>
+              <a:t> ghi khó</a:t>
             </a:r>
             <a:r>
               <a:rPr lang="en-US" sz="2400" dirty="0" spc="1" kern="0">
